--- a/tests/fixtures/sample.pptx
+++ b/tests/fixtures/sample.pptx
@@ -143,7 +143,7 @@
         <p:txBody>
           <a:bodyPr/>
           <a:p>
-            <a:fld id="{0AB9BCCE-188A-40E2-928A-6E3DF450C199}" type="slidenum">
+            <a:fld id="{84F2218C-C939-4D83-B4AB-BF88C1D09724}" type="slidenum">
               <a:t>&lt;#&gt;</a:t>
             </a:fld>
           </a:p>
@@ -628,7 +628,7 @@
             <a:pPr indent="0" algn="r">
               <a:buNone/>
             </a:pPr>
-            <a:fld id="{4453BF4F-2E18-410C-B07B-8D601BE41A39}" type="slidenum">
+            <a:fld id="{AE8C15A7-F837-427A-A2F9-209B447ED717}" type="slidenum">
               <a:rPr b="0" lang="it-IT" sz="1400" spc="-1" strike="noStrike">
                 <a:solidFill>
                   <a:srgbClr val="000000"/>
